--- a/whitepaper/WAIC2026人工智能产业空间白皮书-简报.pptx
+++ b/whitepaper/WAIC2026人工智能产业空间白皮书-简报.pptx
@@ -3189,7 +3189,7 @@
       </p:sp>
       <p:pic>
         <p:nvPicPr>
-          <p:cNvPr id="4" name="Picture 3" descr="logo_fudan_hprc.png"/>
+          <p:cNvPr id="4" name="Picture 3" descr="logo_rchp_print.png"/>
           <p:cNvPicPr>
             <a:picLocks noChangeAspect="1"/>
           </p:cNvPicPr>
@@ -3204,7 +3204,7 @@
         <p:spPr>
           <a:xfrm>
             <a:off x="640080" y="411480"/>
-            <a:ext cx="5669280" cy="1253209"/>
+            <a:ext cx="5669280" cy="2706868"/>
           </a:xfrm>
           <a:prstGeom prst="rect">
             <a:avLst/>
